--- a/decks/MatterForge_Nornickel.pptx
+++ b/decks/MatterForge_Nornickel.pptx
@@ -2489,7 +2489,7 @@
                 <a:ea typeface="Cambria" pitchFamily="34" charset="-122"/>
                 <a:cs typeface="Cambria" pitchFamily="34" charset="-120"/>
               </a:rPr>
-              <a:t>Дорожная карта 24 месяцев и что нам нужно от вас</a:t>
+              <a:t>Дорожная карта и данные от вас</a:t>
             </a:r>
             <a:endParaRPr lang="en-US" sz="3000" dirty="0"/>
           </a:p>
@@ -4095,7 +4095,7 @@
                 <a:ea typeface="Cambria" pitchFamily="34" charset="-122"/>
                 <a:cs typeface="Cambria" pitchFamily="34" charset="-120"/>
               </a:rPr>
-              <a:t>Резюме: два коммерческих кейса, одно честное «нет» и два R&amp;D-трека</a:t>
+              <a:t>Резюме: два кейса и честное «нет»</a:t>
             </a:r>
             <a:endParaRPr lang="en-US" sz="3000" dirty="0"/>
           </a:p>
@@ -4770,7 +4770,7 @@
                 <a:ea typeface="Cambria" pitchFamily="34" charset="-122"/>
                 <a:cs typeface="Cambria" pitchFamily="34" charset="-120"/>
               </a:rPr>
-              <a:t>N3 · Пиролиз стренд-газа: сажа на экспорт, водород на месте</a:t>
+              <a:t>N3 · Пиролиз: сажа на СМП, H₂ на месте</a:t>
             </a:r>
             <a:endParaRPr lang="en-US" sz="3000" dirty="0"/>
           </a:p>
@@ -7118,7 +7118,7 @@
             <a:r>
               <a:rPr lang="en-US" sz="900" dirty="0">
                 <a:solidFill>
-                  <a:srgbClr val="5C6B73"/>
+                  <a:srgbClr val="9DB0B8"/>
                 </a:solidFill>
                 <a:latin typeface="Calibri" pitchFamily="34" charset="0"/>
                 <a:ea typeface="Calibri" pitchFamily="34" charset="-122"/>
@@ -7195,7 +7195,7 @@
                 <a:ea typeface="Cambria" pitchFamily="34" charset="-122"/>
                 <a:cs typeface="Cambria" pitchFamily="34" charset="-120"/>
               </a:rPr>
-              <a:t>R&amp;D-опционы: батарейная вертикаль и химия ваших собственных руд</a:t>
+              <a:t>R&amp;D: катоды и химия ваших руд</a:t>
             </a:r>
             <a:endParaRPr lang="en-US" sz="3000" dirty="0"/>
           </a:p>
@@ -8212,7 +8212,7 @@
             <a:r>
               <a:rPr lang="en-US" sz="900" dirty="0">
                 <a:solidFill>
-                  <a:srgbClr val="5C6B73"/>
+                  <a:srgbClr val="9DB0B8"/>
                 </a:solidFill>
                 <a:latin typeface="Calibri" pitchFamily="34" charset="0"/>
                 <a:ea typeface="Calibri" pitchFamily="34" charset="-122"/>
